--- a/docs/Sentinel_Solution_Presentation.pptx
+++ b/docs/Sentinel_Solution_Presentation.pptx
@@ -3146,9 +3146,33 @@
           </a:p>
         </p:txBody>
       </p:sp>
-      <p:sp>
-        <p:nvSpPr>
-          <p:cNvPr id="3" name="TextBox 2"/>
+      <p:pic>
+        <p:nvPicPr>
+          <p:cNvPr id="3" name="Picture 2" descr="ruvision_logo_small.png"/>
+          <p:cNvPicPr>
+            <a:picLocks noChangeAspect="1"/>
+          </p:cNvPicPr>
+          <p:nvPr/>
+        </p:nvPicPr>
+        <p:blipFill>
+          <a:blip r:embed="rId2"/>
+          <a:stretch>
+            <a:fillRect/>
+          </a:stretch>
+        </p:blipFill>
+        <p:spPr>
+          <a:xfrm>
+            <a:off x="11383419" y="182880"/>
+            <a:ext cx="533956" cy="365760"/>
+          </a:xfrm>
+          <a:prstGeom prst="rect">
+            <a:avLst/>
+          </a:prstGeom>
+        </p:spPr>
+      </p:pic>
+      <p:sp>
+        <p:nvSpPr>
+          <p:cNvPr id="4" name="TextBox 3"/>
           <p:cNvSpPr txBox="1"/>
           <p:nvPr/>
         </p:nvSpPr>
@@ -3187,7 +3211,7 @@
       </p:sp>
       <p:sp>
         <p:nvSpPr>
-          <p:cNvPr id="4" name="TextBox 3"/>
+          <p:cNvPr id="5" name="TextBox 4"/>
           <p:cNvSpPr txBox="1"/>
           <p:nvPr/>
         </p:nvSpPr>
@@ -3226,7 +3250,7 @@
       </p:sp>
       <p:sp>
         <p:nvSpPr>
-          <p:cNvPr id="5" name="TextBox 4"/>
+          <p:cNvPr id="6" name="TextBox 5"/>
           <p:cNvSpPr txBox="1"/>
           <p:nvPr/>
         </p:nvSpPr>
@@ -3265,7 +3289,46 @@
       </p:sp>
       <p:sp>
         <p:nvSpPr>
-          <p:cNvPr id="6" name="Oval 5"/>
+          <p:cNvPr id="7" name="TextBox 6"/>
+          <p:cNvSpPr txBox="1"/>
+          <p:nvPr/>
+        </p:nvSpPr>
+        <p:spPr>
+          <a:xfrm>
+            <a:off x="0" y="4663440"/>
+            <a:ext cx="12191695" cy="365760"/>
+          </a:xfrm>
+          <a:prstGeom prst="rect">
+            <a:avLst/>
+          </a:prstGeom>
+          <a:noFill/>
+        </p:spPr>
+        <p:txBody>
+          <a:bodyPr wrap="square">
+            <a:spAutoFit/>
+          </a:bodyPr>
+          <a:lstStyle/>
+          <a:p>
+            <a:pPr algn="ctr">
+              <a:lnSpc>
+                <a:spcPct val="115000"/>
+              </a:lnSpc>
+            </a:pPr>
+            <a:r>
+              <a:rPr sz="1400" b="0">
+                <a:solidFill>
+                  <a:srgbClr val="5C6B86"/>
+                </a:solidFill>
+                <a:latin typeface="Consolas"/>
+              </a:rPr>
+              <a:t>Built by RuVision Thinking Labs</a:t>
+            </a:r>
+          </a:p>
+        </p:txBody>
+      </p:sp>
+      <p:sp>
+        <p:nvSpPr>
+          <p:cNvPr id="8" name="Oval 7"/>
           <p:cNvSpPr/>
           <p:nvPr/>
         </p:nvSpPr>
@@ -3369,9 +3432,33 @@
           </a:p>
         </p:txBody>
       </p:sp>
-      <p:sp>
-        <p:nvSpPr>
-          <p:cNvPr id="3" name="TextBox 2"/>
+      <p:pic>
+        <p:nvPicPr>
+          <p:cNvPr id="3" name="Picture 2" descr="ruvision_logo_small.png"/>
+          <p:cNvPicPr>
+            <a:picLocks noChangeAspect="1"/>
+          </p:cNvPicPr>
+          <p:nvPr/>
+        </p:nvPicPr>
+        <p:blipFill>
+          <a:blip r:embed="rId2"/>
+          <a:stretch>
+            <a:fillRect/>
+          </a:stretch>
+        </p:blipFill>
+        <p:spPr>
+          <a:xfrm>
+            <a:off x="11383419" y="182880"/>
+            <a:ext cx="533956" cy="365760"/>
+          </a:xfrm>
+          <a:prstGeom prst="rect">
+            <a:avLst/>
+          </a:prstGeom>
+        </p:spPr>
+      </p:pic>
+      <p:sp>
+        <p:nvSpPr>
+          <p:cNvPr id="4" name="TextBox 3"/>
           <p:cNvSpPr txBox="1"/>
           <p:nvPr/>
         </p:nvSpPr>
@@ -3410,7 +3497,7 @@
       </p:sp>
       <p:sp>
         <p:nvSpPr>
-          <p:cNvPr id="4" name="TextBox 3"/>
+          <p:cNvPr id="5" name="TextBox 4"/>
           <p:cNvSpPr txBox="1"/>
           <p:nvPr/>
         </p:nvSpPr>
@@ -3449,7 +3536,7 @@
       </p:sp>
       <p:sp>
         <p:nvSpPr>
-          <p:cNvPr id="5" name="Rectangle 4"/>
+          <p:cNvPr id="6" name="Rectangle 5"/>
           <p:cNvSpPr/>
           <p:nvPr/>
         </p:nvSpPr>
@@ -3493,75 +3580,7 @@
       </p:sp>
       <p:pic>
         <p:nvPicPr>
-          <p:cNvPr id="6" name="Picture 5" descr="camera_feed.png"/>
-          <p:cNvPicPr>
-            <a:picLocks noChangeAspect="1"/>
-          </p:cNvPicPr>
-          <p:nvPr/>
-        </p:nvPicPr>
-        <p:blipFill>
-          <a:blip r:embed="rId2"/>
-          <a:stretch>
-            <a:fillRect/>
-          </a:stretch>
-        </p:blipFill>
-        <p:spPr>
-          <a:xfrm>
-            <a:off x="640080" y="1417320"/>
-            <a:ext cx="5394960" cy="2732658"/>
-          </a:xfrm>
-          <a:prstGeom prst="rect">
-            <a:avLst/>
-          </a:prstGeom>
-          <a:ln w="19050">
-            <a:solidFill>
-              <a:srgbClr val="1E2A3A"/>
-            </a:solidFill>
-          </a:ln>
-        </p:spPr>
-      </p:pic>
-      <p:sp>
-        <p:nvSpPr>
-          <p:cNvPr id="7" name="TextBox 6"/>
-          <p:cNvSpPr txBox="1"/>
-          <p:nvPr/>
-        </p:nvSpPr>
-        <p:spPr>
-          <a:xfrm>
-            <a:off x="640080" y="4204842"/>
-            <a:ext cx="5394960" cy="274320"/>
-          </a:xfrm>
-          <a:prstGeom prst="rect">
-            <a:avLst/>
-          </a:prstGeom>
-          <a:noFill/>
-        </p:spPr>
-        <p:txBody>
-          <a:bodyPr wrap="square">
-            <a:spAutoFit/>
-          </a:bodyPr>
-          <a:lstStyle/>
-          <a:p>
-            <a:pPr algn="ctr">
-              <a:lnSpc>
-                <a:spcPct val="115000"/>
-              </a:lnSpc>
-            </a:pPr>
-            <a:r>
-              <a:rPr sz="1100" b="0">
-                <a:solidFill>
-                  <a:srgbClr val="5C6B86"/>
-                </a:solidFill>
-                <a:latin typeface="Consolas"/>
-              </a:rPr>
-              <a:t>Camera grid — live thumbnails, last-seen plate per camera.</a:t>
-            </a:r>
-          </a:p>
-        </p:txBody>
-      </p:sp>
-      <p:pic>
-        <p:nvPicPr>
-          <p:cNvPr id="8" name="Picture 7" descr="watchlist.png"/>
+          <p:cNvPr id="7" name="Picture 6" descr="camera_feed.png"/>
           <p:cNvPicPr>
             <a:picLocks noChangeAspect="1"/>
           </p:cNvPicPr>
@@ -3575,7 +3594,7 @@
         </p:blipFill>
         <p:spPr>
           <a:xfrm>
-            <a:off x="6172200" y="1417320"/>
+            <a:off x="640080" y="1417320"/>
             <a:ext cx="5394960" cy="2732658"/>
           </a:xfrm>
           <a:prstGeom prst="rect">
@@ -3590,13 +3609,13 @@
       </p:pic>
       <p:sp>
         <p:nvSpPr>
-          <p:cNvPr id="9" name="TextBox 8"/>
+          <p:cNvPr id="8" name="TextBox 7"/>
           <p:cNvSpPr txBox="1"/>
           <p:nvPr/>
         </p:nvSpPr>
         <p:spPr>
           <a:xfrm>
-            <a:off x="6172200" y="4204842"/>
+            <a:off x="640080" y="4204842"/>
             <a:ext cx="5394960" cy="274320"/>
           </a:xfrm>
           <a:prstGeom prst="rect">
@@ -3622,11 +3641,40 @@
                 </a:solidFill>
                 <a:latin typeface="Consolas"/>
               </a:rPr>
-              <a:t>Watchlist administration.</a:t>
-            </a:r>
-          </a:p>
-        </p:txBody>
-      </p:sp>
+              <a:t>Camera grid — live thumbnails, last-seen plate per camera.</a:t>
+            </a:r>
+          </a:p>
+        </p:txBody>
+      </p:sp>
+      <p:pic>
+        <p:nvPicPr>
+          <p:cNvPr id="9" name="Picture 8" descr="watchlist.png"/>
+          <p:cNvPicPr>
+            <a:picLocks noChangeAspect="1"/>
+          </p:cNvPicPr>
+          <p:nvPr/>
+        </p:nvPicPr>
+        <p:blipFill>
+          <a:blip r:embed="rId4"/>
+          <a:stretch>
+            <a:fillRect/>
+          </a:stretch>
+        </p:blipFill>
+        <p:spPr>
+          <a:xfrm>
+            <a:off x="6172200" y="1417320"/>
+            <a:ext cx="5394960" cy="2732658"/>
+          </a:xfrm>
+          <a:prstGeom prst="rect">
+            <a:avLst/>
+          </a:prstGeom>
+          <a:ln w="19050">
+            <a:solidFill>
+              <a:srgbClr val="1E2A3A"/>
+            </a:solidFill>
+          </a:ln>
+        </p:spPr>
+      </p:pic>
       <p:sp>
         <p:nvSpPr>
           <p:cNvPr id="10" name="TextBox 9"/>
@@ -3635,8 +3683,8 @@
         </p:nvSpPr>
         <p:spPr>
           <a:xfrm>
-            <a:off x="548640" y="6473952"/>
-            <a:ext cx="5486400" cy="274320"/>
+            <a:off x="6172200" y="4204842"/>
+            <a:ext cx="5394960" cy="274320"/>
           </a:xfrm>
           <a:prstGeom prst="rect">
             <a:avLst/>
@@ -3649,6 +3697,45 @@
           </a:bodyPr>
           <a:lstStyle/>
           <a:p>
+            <a:pPr algn="ctr">
+              <a:lnSpc>
+                <a:spcPct val="115000"/>
+              </a:lnSpc>
+            </a:pPr>
+            <a:r>
+              <a:rPr sz="1100" b="0">
+                <a:solidFill>
+                  <a:srgbClr val="5C6B86"/>
+                </a:solidFill>
+                <a:latin typeface="Consolas"/>
+              </a:rPr>
+              <a:t>Watchlist administration.</a:t>
+            </a:r>
+          </a:p>
+        </p:txBody>
+      </p:sp>
+      <p:sp>
+        <p:nvSpPr>
+          <p:cNvPr id="11" name="TextBox 10"/>
+          <p:cNvSpPr txBox="1"/>
+          <p:nvPr/>
+        </p:nvSpPr>
+        <p:spPr>
+          <a:xfrm>
+            <a:off x="548640" y="6473952"/>
+            <a:ext cx="5486400" cy="274320"/>
+          </a:xfrm>
+          <a:prstGeom prst="rect">
+            <a:avLst/>
+          </a:prstGeom>
+          <a:noFill/>
+        </p:spPr>
+        <p:txBody>
+          <a:bodyPr wrap="square">
+            <a:spAutoFit/>
+          </a:bodyPr>
+          <a:lstStyle/>
+          <a:p>
             <a:pPr algn="l">
               <a:lnSpc>
                 <a:spcPct val="115000"/>
@@ -3668,7 +3755,7 @@
       </p:sp>
       <p:sp>
         <p:nvSpPr>
-          <p:cNvPr id="11" name="TextBox 10"/>
+          <p:cNvPr id="12" name="TextBox 11"/>
           <p:cNvSpPr txBox="1"/>
           <p:nvPr/>
         </p:nvSpPr>
@@ -3767,9 +3854,33 @@
           </a:p>
         </p:txBody>
       </p:sp>
-      <p:sp>
-        <p:nvSpPr>
-          <p:cNvPr id="3" name="TextBox 2"/>
+      <p:pic>
+        <p:nvPicPr>
+          <p:cNvPr id="3" name="Picture 2" descr="ruvision_logo_small.png"/>
+          <p:cNvPicPr>
+            <a:picLocks noChangeAspect="1"/>
+          </p:cNvPicPr>
+          <p:nvPr/>
+        </p:nvPicPr>
+        <p:blipFill>
+          <a:blip r:embed="rId2"/>
+          <a:stretch>
+            <a:fillRect/>
+          </a:stretch>
+        </p:blipFill>
+        <p:spPr>
+          <a:xfrm>
+            <a:off x="11383419" y="182880"/>
+            <a:ext cx="533956" cy="365760"/>
+          </a:xfrm>
+          <a:prstGeom prst="rect">
+            <a:avLst/>
+          </a:prstGeom>
+        </p:spPr>
+      </p:pic>
+      <p:sp>
+        <p:nvSpPr>
+          <p:cNvPr id="4" name="TextBox 3"/>
           <p:cNvSpPr txBox="1"/>
           <p:nvPr/>
         </p:nvSpPr>
@@ -3808,7 +3919,7 @@
       </p:sp>
       <p:sp>
         <p:nvSpPr>
-          <p:cNvPr id="4" name="TextBox 3"/>
+          <p:cNvPr id="5" name="TextBox 4"/>
           <p:cNvSpPr txBox="1"/>
           <p:nvPr/>
         </p:nvSpPr>
@@ -3847,7 +3958,7 @@
       </p:sp>
       <p:sp>
         <p:nvSpPr>
-          <p:cNvPr id="5" name="Rectangle 4"/>
+          <p:cNvPr id="6" name="Rectangle 5"/>
           <p:cNvSpPr/>
           <p:nvPr/>
         </p:nvSpPr>
@@ -3891,7 +4002,7 @@
       </p:sp>
       <p:sp>
         <p:nvSpPr>
-          <p:cNvPr id="6" name="Rounded Rectangle 5"/>
+          <p:cNvPr id="7" name="Rounded Rectangle 6"/>
           <p:cNvSpPr/>
           <p:nvPr/>
         </p:nvSpPr>
@@ -3939,7 +4050,7 @@
       </p:sp>
       <p:sp>
         <p:nvSpPr>
-          <p:cNvPr id="7" name="TextBox 6"/>
+          <p:cNvPr id="8" name="TextBox 7"/>
           <p:cNvSpPr txBox="1"/>
           <p:nvPr/>
         </p:nvSpPr>
@@ -3978,7 +4089,7 @@
       </p:sp>
       <p:sp>
         <p:nvSpPr>
-          <p:cNvPr id="8" name="TextBox 7"/>
+          <p:cNvPr id="9" name="TextBox 8"/>
           <p:cNvSpPr txBox="1"/>
           <p:nvPr/>
         </p:nvSpPr>
@@ -4017,7 +4128,7 @@
       </p:sp>
       <p:sp>
         <p:nvSpPr>
-          <p:cNvPr id="9" name="Rounded Rectangle 8"/>
+          <p:cNvPr id="10" name="Rounded Rectangle 9"/>
           <p:cNvSpPr/>
           <p:nvPr/>
         </p:nvSpPr>
@@ -4065,7 +4176,7 @@
       </p:sp>
       <p:sp>
         <p:nvSpPr>
-          <p:cNvPr id="10" name="TextBox 9"/>
+          <p:cNvPr id="11" name="TextBox 10"/>
           <p:cNvSpPr txBox="1"/>
           <p:nvPr/>
         </p:nvSpPr>
@@ -4104,7 +4215,7 @@
       </p:sp>
       <p:sp>
         <p:nvSpPr>
-          <p:cNvPr id="11" name="TextBox 10"/>
+          <p:cNvPr id="12" name="TextBox 11"/>
           <p:cNvSpPr txBox="1"/>
           <p:nvPr/>
         </p:nvSpPr>
@@ -4143,7 +4254,7 @@
       </p:sp>
       <p:sp>
         <p:nvSpPr>
-          <p:cNvPr id="12" name="Rounded Rectangle 11"/>
+          <p:cNvPr id="13" name="Rounded Rectangle 12"/>
           <p:cNvSpPr/>
           <p:nvPr/>
         </p:nvSpPr>
@@ -4191,7 +4302,7 @@
       </p:sp>
       <p:sp>
         <p:nvSpPr>
-          <p:cNvPr id="13" name="TextBox 12"/>
+          <p:cNvPr id="14" name="TextBox 13"/>
           <p:cNvSpPr txBox="1"/>
           <p:nvPr/>
         </p:nvSpPr>
@@ -4230,7 +4341,7 @@
       </p:sp>
       <p:sp>
         <p:nvSpPr>
-          <p:cNvPr id="14" name="TextBox 13"/>
+          <p:cNvPr id="15" name="TextBox 14"/>
           <p:cNvSpPr txBox="1"/>
           <p:nvPr/>
         </p:nvSpPr>
@@ -4269,7 +4380,7 @@
       </p:sp>
       <p:sp>
         <p:nvSpPr>
-          <p:cNvPr id="15" name="Rounded Rectangle 14"/>
+          <p:cNvPr id="16" name="Rounded Rectangle 15"/>
           <p:cNvSpPr/>
           <p:nvPr/>
         </p:nvSpPr>
@@ -4317,7 +4428,7 @@
       </p:sp>
       <p:sp>
         <p:nvSpPr>
-          <p:cNvPr id="16" name="TextBox 15"/>
+          <p:cNvPr id="17" name="TextBox 16"/>
           <p:cNvSpPr txBox="1"/>
           <p:nvPr/>
         </p:nvSpPr>
@@ -4356,7 +4467,7 @@
       </p:sp>
       <p:sp>
         <p:nvSpPr>
-          <p:cNvPr id="17" name="TextBox 16"/>
+          <p:cNvPr id="18" name="TextBox 17"/>
           <p:cNvSpPr txBox="1"/>
           <p:nvPr/>
         </p:nvSpPr>
@@ -4395,7 +4506,7 @@
       </p:sp>
       <p:sp>
         <p:nvSpPr>
-          <p:cNvPr id="18" name="Rounded Rectangle 17"/>
+          <p:cNvPr id="19" name="Rounded Rectangle 18"/>
           <p:cNvSpPr/>
           <p:nvPr/>
         </p:nvSpPr>
@@ -4443,7 +4554,7 @@
       </p:sp>
       <p:sp>
         <p:nvSpPr>
-          <p:cNvPr id="19" name="TextBox 18"/>
+          <p:cNvPr id="20" name="TextBox 19"/>
           <p:cNvSpPr txBox="1"/>
           <p:nvPr/>
         </p:nvSpPr>
@@ -4482,7 +4593,7 @@
       </p:sp>
       <p:sp>
         <p:nvSpPr>
-          <p:cNvPr id="20" name="TextBox 19"/>
+          <p:cNvPr id="21" name="TextBox 20"/>
           <p:cNvSpPr txBox="1"/>
           <p:nvPr/>
         </p:nvSpPr>
@@ -4521,7 +4632,7 @@
       </p:sp>
       <p:sp>
         <p:nvSpPr>
-          <p:cNvPr id="21" name="TextBox 20"/>
+          <p:cNvPr id="22" name="TextBox 21"/>
           <p:cNvSpPr txBox="1"/>
           <p:nvPr/>
         </p:nvSpPr>
@@ -4560,7 +4671,7 @@
       </p:sp>
       <p:sp>
         <p:nvSpPr>
-          <p:cNvPr id="22" name="TextBox 21"/>
+          <p:cNvPr id="23" name="TextBox 22"/>
           <p:cNvSpPr txBox="1"/>
           <p:nvPr/>
         </p:nvSpPr>
@@ -4599,7 +4710,7 @@
       </p:sp>
       <p:sp>
         <p:nvSpPr>
-          <p:cNvPr id="23" name="TextBox 22"/>
+          <p:cNvPr id="24" name="TextBox 23"/>
           <p:cNvSpPr txBox="1"/>
           <p:nvPr/>
         </p:nvSpPr>
@@ -4698,9 +4809,33 @@
           </a:p>
         </p:txBody>
       </p:sp>
-      <p:sp>
-        <p:nvSpPr>
-          <p:cNvPr id="3" name="TextBox 2"/>
+      <p:pic>
+        <p:nvPicPr>
+          <p:cNvPr id="3" name="Picture 2" descr="ruvision_logo_small.png"/>
+          <p:cNvPicPr>
+            <a:picLocks noChangeAspect="1"/>
+          </p:cNvPicPr>
+          <p:nvPr/>
+        </p:nvPicPr>
+        <p:blipFill>
+          <a:blip r:embed="rId2"/>
+          <a:stretch>
+            <a:fillRect/>
+          </a:stretch>
+        </p:blipFill>
+        <p:spPr>
+          <a:xfrm>
+            <a:off x="11383419" y="182880"/>
+            <a:ext cx="533956" cy="365760"/>
+          </a:xfrm>
+          <a:prstGeom prst="rect">
+            <a:avLst/>
+          </a:prstGeom>
+        </p:spPr>
+      </p:pic>
+      <p:sp>
+        <p:nvSpPr>
+          <p:cNvPr id="4" name="TextBox 3"/>
           <p:cNvSpPr txBox="1"/>
           <p:nvPr/>
         </p:nvSpPr>
@@ -4739,7 +4874,7 @@
       </p:sp>
       <p:sp>
         <p:nvSpPr>
-          <p:cNvPr id="4" name="TextBox 3"/>
+          <p:cNvPr id="5" name="TextBox 4"/>
           <p:cNvSpPr txBox="1"/>
           <p:nvPr/>
         </p:nvSpPr>
@@ -4778,7 +4913,7 @@
       </p:sp>
       <p:sp>
         <p:nvSpPr>
-          <p:cNvPr id="5" name="Rectangle 4"/>
+          <p:cNvPr id="6" name="Rectangle 5"/>
           <p:cNvSpPr/>
           <p:nvPr/>
         </p:nvSpPr>
@@ -4822,7 +4957,7 @@
       </p:sp>
       <p:sp>
         <p:nvSpPr>
-          <p:cNvPr id="6" name="TextBox 5"/>
+          <p:cNvPr id="7" name="TextBox 6"/>
           <p:cNvSpPr txBox="1"/>
           <p:nvPr/>
         </p:nvSpPr>
@@ -4940,7 +5075,7 @@
       </p:sp>
       <p:sp>
         <p:nvSpPr>
-          <p:cNvPr id="7" name="TextBox 6"/>
+          <p:cNvPr id="8" name="TextBox 7"/>
           <p:cNvSpPr txBox="1"/>
           <p:nvPr/>
         </p:nvSpPr>
@@ -4979,7 +5114,7 @@
       </p:sp>
       <p:sp>
         <p:nvSpPr>
-          <p:cNvPr id="8" name="TextBox 7"/>
+          <p:cNvPr id="9" name="TextBox 8"/>
           <p:cNvSpPr txBox="1"/>
           <p:nvPr/>
         </p:nvSpPr>
@@ -5078,9 +5213,33 @@
           </a:p>
         </p:txBody>
       </p:sp>
-      <p:sp>
-        <p:nvSpPr>
-          <p:cNvPr id="3" name="TextBox 2"/>
+      <p:pic>
+        <p:nvPicPr>
+          <p:cNvPr id="3" name="Picture 2" descr="ruvision_logo_small.png"/>
+          <p:cNvPicPr>
+            <a:picLocks noChangeAspect="1"/>
+          </p:cNvPicPr>
+          <p:nvPr/>
+        </p:nvPicPr>
+        <p:blipFill>
+          <a:blip r:embed="rId2"/>
+          <a:stretch>
+            <a:fillRect/>
+          </a:stretch>
+        </p:blipFill>
+        <p:spPr>
+          <a:xfrm>
+            <a:off x="11383419" y="182880"/>
+            <a:ext cx="533956" cy="365760"/>
+          </a:xfrm>
+          <a:prstGeom prst="rect">
+            <a:avLst/>
+          </a:prstGeom>
+        </p:spPr>
+      </p:pic>
+      <p:sp>
+        <p:nvSpPr>
+          <p:cNvPr id="4" name="TextBox 3"/>
           <p:cNvSpPr txBox="1"/>
           <p:nvPr/>
         </p:nvSpPr>
@@ -5119,7 +5278,7 @@
       </p:sp>
       <p:sp>
         <p:nvSpPr>
-          <p:cNvPr id="4" name="TextBox 3"/>
+          <p:cNvPr id="5" name="TextBox 4"/>
           <p:cNvSpPr txBox="1"/>
           <p:nvPr/>
         </p:nvSpPr>
@@ -5158,7 +5317,7 @@
       </p:sp>
       <p:sp>
         <p:nvSpPr>
-          <p:cNvPr id="5" name="Rectangle 4"/>
+          <p:cNvPr id="6" name="Rectangle 5"/>
           <p:cNvSpPr/>
           <p:nvPr/>
         </p:nvSpPr>
@@ -5202,7 +5361,7 @@
       </p:sp>
       <p:sp>
         <p:nvSpPr>
-          <p:cNvPr id="6" name="TextBox 5"/>
+          <p:cNvPr id="7" name="TextBox 6"/>
           <p:cNvSpPr txBox="1"/>
           <p:nvPr/>
         </p:nvSpPr>
@@ -5282,7 +5441,7 @@
       </p:sp>
       <p:sp>
         <p:nvSpPr>
-          <p:cNvPr id="7" name="TextBox 6"/>
+          <p:cNvPr id="8" name="TextBox 7"/>
           <p:cNvSpPr txBox="1"/>
           <p:nvPr/>
         </p:nvSpPr>
@@ -5321,7 +5480,7 @@
       </p:sp>
       <p:sp>
         <p:nvSpPr>
-          <p:cNvPr id="8" name="TextBox 7"/>
+          <p:cNvPr id="9" name="TextBox 8"/>
           <p:cNvSpPr txBox="1"/>
           <p:nvPr/>
         </p:nvSpPr>
@@ -5420,9 +5579,33 @@
           </a:p>
         </p:txBody>
       </p:sp>
-      <p:sp>
-        <p:nvSpPr>
-          <p:cNvPr id="3" name="TextBox 2"/>
+      <p:pic>
+        <p:nvPicPr>
+          <p:cNvPr id="3" name="Picture 2" descr="ruvision_logo_small.png"/>
+          <p:cNvPicPr>
+            <a:picLocks noChangeAspect="1"/>
+          </p:cNvPicPr>
+          <p:nvPr/>
+        </p:nvPicPr>
+        <p:blipFill>
+          <a:blip r:embed="rId2"/>
+          <a:stretch>
+            <a:fillRect/>
+          </a:stretch>
+        </p:blipFill>
+        <p:spPr>
+          <a:xfrm>
+            <a:off x="11383419" y="182880"/>
+            <a:ext cx="533956" cy="365760"/>
+          </a:xfrm>
+          <a:prstGeom prst="rect">
+            <a:avLst/>
+          </a:prstGeom>
+        </p:spPr>
+      </p:pic>
+      <p:sp>
+        <p:nvSpPr>
+          <p:cNvPr id="4" name="TextBox 3"/>
           <p:cNvSpPr txBox="1"/>
           <p:nvPr/>
         </p:nvSpPr>
@@ -5461,7 +5644,7 @@
       </p:sp>
       <p:sp>
         <p:nvSpPr>
-          <p:cNvPr id="4" name="TextBox 3"/>
+          <p:cNvPr id="5" name="TextBox 4"/>
           <p:cNvSpPr txBox="1"/>
           <p:nvPr/>
         </p:nvSpPr>
@@ -5500,7 +5683,7 @@
       </p:sp>
       <p:sp>
         <p:nvSpPr>
-          <p:cNvPr id="5" name="Rectangle 4"/>
+          <p:cNvPr id="6" name="Rectangle 5"/>
           <p:cNvSpPr/>
           <p:nvPr/>
         </p:nvSpPr>
@@ -5544,7 +5727,7 @@
       </p:sp>
       <p:sp>
         <p:nvSpPr>
-          <p:cNvPr id="6" name="TextBox 5"/>
+          <p:cNvPr id="7" name="TextBox 6"/>
           <p:cNvSpPr txBox="1"/>
           <p:nvPr/>
         </p:nvSpPr>
@@ -5624,7 +5807,7 @@
       </p:sp>
       <p:sp>
         <p:nvSpPr>
-          <p:cNvPr id="7" name="TextBox 6"/>
+          <p:cNvPr id="8" name="TextBox 7"/>
           <p:cNvSpPr txBox="1"/>
           <p:nvPr/>
         </p:nvSpPr>
@@ -5663,7 +5846,7 @@
       </p:sp>
       <p:sp>
         <p:nvSpPr>
-          <p:cNvPr id="8" name="TextBox 7"/>
+          <p:cNvPr id="9" name="TextBox 8"/>
           <p:cNvSpPr txBox="1"/>
           <p:nvPr/>
         </p:nvSpPr>
@@ -5762,9 +5945,33 @@
           </a:p>
         </p:txBody>
       </p:sp>
-      <p:sp>
-        <p:nvSpPr>
-          <p:cNvPr id="3" name="TextBox 2"/>
+      <p:pic>
+        <p:nvPicPr>
+          <p:cNvPr id="3" name="Picture 2" descr="ruvision_logo_small.png"/>
+          <p:cNvPicPr>
+            <a:picLocks noChangeAspect="1"/>
+          </p:cNvPicPr>
+          <p:nvPr/>
+        </p:nvPicPr>
+        <p:blipFill>
+          <a:blip r:embed="rId2"/>
+          <a:stretch>
+            <a:fillRect/>
+          </a:stretch>
+        </p:blipFill>
+        <p:spPr>
+          <a:xfrm>
+            <a:off x="11383419" y="182880"/>
+            <a:ext cx="533956" cy="365760"/>
+          </a:xfrm>
+          <a:prstGeom prst="rect">
+            <a:avLst/>
+          </a:prstGeom>
+        </p:spPr>
+      </p:pic>
+      <p:sp>
+        <p:nvSpPr>
+          <p:cNvPr id="4" name="TextBox 3"/>
           <p:cNvSpPr txBox="1"/>
           <p:nvPr/>
         </p:nvSpPr>
@@ -5803,7 +6010,7 @@
       </p:sp>
       <p:sp>
         <p:nvSpPr>
-          <p:cNvPr id="4" name="TextBox 3"/>
+          <p:cNvPr id="5" name="TextBox 4"/>
           <p:cNvSpPr txBox="1"/>
           <p:nvPr/>
         </p:nvSpPr>
@@ -5902,9 +6109,33 @@
           </a:p>
         </p:txBody>
       </p:sp>
-      <p:sp>
-        <p:nvSpPr>
-          <p:cNvPr id="3" name="TextBox 2"/>
+      <p:pic>
+        <p:nvPicPr>
+          <p:cNvPr id="3" name="Picture 2" descr="ruvision_logo_small.png"/>
+          <p:cNvPicPr>
+            <a:picLocks noChangeAspect="1"/>
+          </p:cNvPicPr>
+          <p:nvPr/>
+        </p:nvPicPr>
+        <p:blipFill>
+          <a:blip r:embed="rId2"/>
+          <a:stretch>
+            <a:fillRect/>
+          </a:stretch>
+        </p:blipFill>
+        <p:spPr>
+          <a:xfrm>
+            <a:off x="11383419" y="182880"/>
+            <a:ext cx="533956" cy="365760"/>
+          </a:xfrm>
+          <a:prstGeom prst="rect">
+            <a:avLst/>
+          </a:prstGeom>
+        </p:spPr>
+      </p:pic>
+      <p:sp>
+        <p:nvSpPr>
+          <p:cNvPr id="4" name="TextBox 3"/>
           <p:cNvSpPr txBox="1"/>
           <p:nvPr/>
         </p:nvSpPr>
@@ -5943,7 +6174,7 @@
       </p:sp>
       <p:sp>
         <p:nvSpPr>
-          <p:cNvPr id="4" name="TextBox 3"/>
+          <p:cNvPr id="5" name="TextBox 4"/>
           <p:cNvSpPr txBox="1"/>
           <p:nvPr/>
         </p:nvSpPr>
@@ -5982,7 +6213,7 @@
       </p:sp>
       <p:sp>
         <p:nvSpPr>
-          <p:cNvPr id="5" name="Rectangle 4"/>
+          <p:cNvPr id="6" name="Rectangle 5"/>
           <p:cNvSpPr/>
           <p:nvPr/>
         </p:nvSpPr>
@@ -6026,7 +6257,7 @@
       </p:sp>
       <p:sp>
         <p:nvSpPr>
-          <p:cNvPr id="6" name="TextBox 5"/>
+          <p:cNvPr id="7" name="TextBox 6"/>
           <p:cNvSpPr txBox="1"/>
           <p:nvPr/>
         </p:nvSpPr>
@@ -6125,7 +6356,7 @@
       </p:sp>
       <p:sp>
         <p:nvSpPr>
-          <p:cNvPr id="7" name="TextBox 6"/>
+          <p:cNvPr id="8" name="TextBox 7"/>
           <p:cNvSpPr txBox="1"/>
           <p:nvPr/>
         </p:nvSpPr>
@@ -6164,7 +6395,7 @@
       </p:sp>
       <p:sp>
         <p:nvSpPr>
-          <p:cNvPr id="8" name="TextBox 7"/>
+          <p:cNvPr id="9" name="TextBox 8"/>
           <p:cNvSpPr txBox="1"/>
           <p:nvPr/>
         </p:nvSpPr>
@@ -6263,9 +6494,33 @@
           </a:p>
         </p:txBody>
       </p:sp>
-      <p:sp>
-        <p:nvSpPr>
-          <p:cNvPr id="3" name="TextBox 2"/>
+      <p:pic>
+        <p:nvPicPr>
+          <p:cNvPr id="3" name="Picture 2" descr="ruvision_logo_small.png"/>
+          <p:cNvPicPr>
+            <a:picLocks noChangeAspect="1"/>
+          </p:cNvPicPr>
+          <p:nvPr/>
+        </p:nvPicPr>
+        <p:blipFill>
+          <a:blip r:embed="rId2"/>
+          <a:stretch>
+            <a:fillRect/>
+          </a:stretch>
+        </p:blipFill>
+        <p:spPr>
+          <a:xfrm>
+            <a:off x="11383419" y="182880"/>
+            <a:ext cx="533956" cy="365760"/>
+          </a:xfrm>
+          <a:prstGeom prst="rect">
+            <a:avLst/>
+          </a:prstGeom>
+        </p:spPr>
+      </p:pic>
+      <p:sp>
+        <p:nvSpPr>
+          <p:cNvPr id="4" name="TextBox 3"/>
           <p:cNvSpPr txBox="1"/>
           <p:nvPr/>
         </p:nvSpPr>
@@ -6304,7 +6559,7 @@
       </p:sp>
       <p:sp>
         <p:nvSpPr>
-          <p:cNvPr id="4" name="TextBox 3"/>
+          <p:cNvPr id="5" name="TextBox 4"/>
           <p:cNvSpPr txBox="1"/>
           <p:nvPr/>
         </p:nvSpPr>
@@ -6343,7 +6598,7 @@
       </p:sp>
       <p:sp>
         <p:nvSpPr>
-          <p:cNvPr id="5" name="Rectangle 4"/>
+          <p:cNvPr id="6" name="Rectangle 5"/>
           <p:cNvSpPr/>
           <p:nvPr/>
         </p:nvSpPr>
@@ -6387,7 +6642,7 @@
       </p:sp>
       <p:sp>
         <p:nvSpPr>
-          <p:cNvPr id="6" name="TextBox 5"/>
+          <p:cNvPr id="7" name="TextBox 6"/>
           <p:cNvSpPr txBox="1"/>
           <p:nvPr/>
         </p:nvSpPr>
@@ -6467,7 +6722,7 @@
       </p:sp>
       <p:sp>
         <p:nvSpPr>
-          <p:cNvPr id="7" name="Rounded Rectangle 6"/>
+          <p:cNvPr id="8" name="Rounded Rectangle 7"/>
           <p:cNvSpPr/>
           <p:nvPr/>
         </p:nvSpPr>
@@ -6515,7 +6770,7 @@
       </p:sp>
       <p:sp>
         <p:nvSpPr>
-          <p:cNvPr id="8" name="TextBox 7"/>
+          <p:cNvPr id="9" name="TextBox 8"/>
           <p:cNvSpPr txBox="1"/>
           <p:nvPr/>
         </p:nvSpPr>
@@ -6554,7 +6809,7 @@
       </p:sp>
       <p:sp>
         <p:nvSpPr>
-          <p:cNvPr id="9" name="TextBox 8"/>
+          <p:cNvPr id="10" name="TextBox 9"/>
           <p:cNvSpPr txBox="1"/>
           <p:nvPr/>
         </p:nvSpPr>
@@ -6634,7 +6889,7 @@
       </p:sp>
       <p:sp>
         <p:nvSpPr>
-          <p:cNvPr id="10" name="TextBox 9"/>
+          <p:cNvPr id="11" name="TextBox 10"/>
           <p:cNvSpPr txBox="1"/>
           <p:nvPr/>
         </p:nvSpPr>
@@ -6673,7 +6928,7 @@
       </p:sp>
       <p:sp>
         <p:nvSpPr>
-          <p:cNvPr id="11" name="TextBox 10"/>
+          <p:cNvPr id="12" name="TextBox 11"/>
           <p:cNvSpPr txBox="1"/>
           <p:nvPr/>
         </p:nvSpPr>
@@ -6772,9 +7027,33 @@
           </a:p>
         </p:txBody>
       </p:sp>
-      <p:sp>
-        <p:nvSpPr>
-          <p:cNvPr id="3" name="TextBox 2"/>
+      <p:pic>
+        <p:nvPicPr>
+          <p:cNvPr id="3" name="Picture 2" descr="ruvision_logo_small.png"/>
+          <p:cNvPicPr>
+            <a:picLocks noChangeAspect="1"/>
+          </p:cNvPicPr>
+          <p:nvPr/>
+        </p:nvPicPr>
+        <p:blipFill>
+          <a:blip r:embed="rId2"/>
+          <a:stretch>
+            <a:fillRect/>
+          </a:stretch>
+        </p:blipFill>
+        <p:spPr>
+          <a:xfrm>
+            <a:off x="11383419" y="182880"/>
+            <a:ext cx="533956" cy="365760"/>
+          </a:xfrm>
+          <a:prstGeom prst="rect">
+            <a:avLst/>
+          </a:prstGeom>
+        </p:spPr>
+      </p:pic>
+      <p:sp>
+        <p:nvSpPr>
+          <p:cNvPr id="4" name="TextBox 3"/>
           <p:cNvSpPr txBox="1"/>
           <p:nvPr/>
         </p:nvSpPr>
@@ -6813,7 +7092,7 @@
       </p:sp>
       <p:sp>
         <p:nvSpPr>
-          <p:cNvPr id="4" name="TextBox 3"/>
+          <p:cNvPr id="5" name="TextBox 4"/>
           <p:cNvSpPr txBox="1"/>
           <p:nvPr/>
         </p:nvSpPr>
@@ -6852,7 +7131,7 @@
       </p:sp>
       <p:sp>
         <p:nvSpPr>
-          <p:cNvPr id="5" name="Rectangle 4"/>
+          <p:cNvPr id="6" name="Rectangle 5"/>
           <p:cNvSpPr/>
           <p:nvPr/>
         </p:nvSpPr>
@@ -6896,7 +7175,7 @@
       </p:sp>
       <p:sp>
         <p:nvSpPr>
-          <p:cNvPr id="6" name="Rounded Rectangle 5"/>
+          <p:cNvPr id="7" name="Rounded Rectangle 6"/>
           <p:cNvSpPr/>
           <p:nvPr/>
         </p:nvSpPr>
@@ -6953,7 +7232,7 @@
       </p:sp>
       <p:sp>
         <p:nvSpPr>
-          <p:cNvPr id="7" name="TextBox 6"/>
+          <p:cNvPr id="8" name="TextBox 7"/>
           <p:cNvSpPr txBox="1"/>
           <p:nvPr/>
         </p:nvSpPr>
@@ -6992,7 +7271,7 @@
       </p:sp>
       <p:sp>
         <p:nvSpPr>
-          <p:cNvPr id="8" name="Rounded Rectangle 7"/>
+          <p:cNvPr id="9" name="Rounded Rectangle 8"/>
           <p:cNvSpPr/>
           <p:nvPr/>
         </p:nvSpPr>
@@ -7048,7 +7327,7 @@
       </p:sp>
       <p:sp>
         <p:nvSpPr>
-          <p:cNvPr id="9" name="TextBox 8"/>
+          <p:cNvPr id="10" name="TextBox 9"/>
           <p:cNvSpPr txBox="1"/>
           <p:nvPr/>
         </p:nvSpPr>
@@ -7087,7 +7366,7 @@
       </p:sp>
       <p:sp>
         <p:nvSpPr>
-          <p:cNvPr id="10" name="Rounded Rectangle 9"/>
+          <p:cNvPr id="11" name="Rounded Rectangle 10"/>
           <p:cNvSpPr/>
           <p:nvPr/>
         </p:nvSpPr>
@@ -7144,7 +7423,7 @@
       </p:sp>
       <p:sp>
         <p:nvSpPr>
-          <p:cNvPr id="11" name="TextBox 10"/>
+          <p:cNvPr id="12" name="TextBox 11"/>
           <p:cNvSpPr txBox="1"/>
           <p:nvPr/>
         </p:nvSpPr>
@@ -7183,7 +7462,7 @@
       </p:sp>
       <p:sp>
         <p:nvSpPr>
-          <p:cNvPr id="12" name="Rounded Rectangle 11"/>
+          <p:cNvPr id="13" name="Rounded Rectangle 12"/>
           <p:cNvSpPr/>
           <p:nvPr/>
         </p:nvSpPr>
@@ -7240,7 +7519,7 @@
       </p:sp>
       <p:sp>
         <p:nvSpPr>
-          <p:cNvPr id="13" name="TextBox 12"/>
+          <p:cNvPr id="14" name="TextBox 13"/>
           <p:cNvSpPr txBox="1"/>
           <p:nvPr/>
         </p:nvSpPr>
@@ -7279,7 +7558,7 @@
       </p:sp>
       <p:sp>
         <p:nvSpPr>
-          <p:cNvPr id="14" name="Rounded Rectangle 13"/>
+          <p:cNvPr id="15" name="Rounded Rectangle 14"/>
           <p:cNvSpPr/>
           <p:nvPr/>
         </p:nvSpPr>
@@ -7336,7 +7615,7 @@
       </p:sp>
       <p:sp>
         <p:nvSpPr>
-          <p:cNvPr id="15" name="TextBox 14"/>
+          <p:cNvPr id="16" name="TextBox 15"/>
           <p:cNvSpPr txBox="1"/>
           <p:nvPr/>
         </p:nvSpPr>
@@ -7375,7 +7654,7 @@
       </p:sp>
       <p:sp>
         <p:nvSpPr>
-          <p:cNvPr id="16" name="Rounded Rectangle 15"/>
+          <p:cNvPr id="17" name="Rounded Rectangle 16"/>
           <p:cNvSpPr/>
           <p:nvPr/>
         </p:nvSpPr>
@@ -7432,7 +7711,7 @@
       </p:sp>
       <p:sp>
         <p:nvSpPr>
-          <p:cNvPr id="17" name="TextBox 16"/>
+          <p:cNvPr id="18" name="TextBox 17"/>
           <p:cNvSpPr txBox="1"/>
           <p:nvPr/>
         </p:nvSpPr>
@@ -7471,7 +7750,7 @@
       </p:sp>
       <p:sp>
         <p:nvSpPr>
-          <p:cNvPr id="18" name="Rounded Rectangle 17"/>
+          <p:cNvPr id="19" name="Rounded Rectangle 18"/>
           <p:cNvSpPr/>
           <p:nvPr/>
         </p:nvSpPr>
@@ -7519,7 +7798,7 @@
       </p:sp>
       <p:sp>
         <p:nvSpPr>
-          <p:cNvPr id="19" name="TextBox 18"/>
+          <p:cNvPr id="20" name="TextBox 19"/>
           <p:cNvSpPr txBox="1"/>
           <p:nvPr/>
         </p:nvSpPr>
@@ -7599,7 +7878,7 @@
       </p:sp>
       <p:sp>
         <p:nvSpPr>
-          <p:cNvPr id="20" name="TextBox 19"/>
+          <p:cNvPr id="21" name="TextBox 20"/>
           <p:cNvSpPr txBox="1"/>
           <p:nvPr/>
         </p:nvSpPr>
@@ -7638,7 +7917,7 @@
       </p:sp>
       <p:sp>
         <p:nvSpPr>
-          <p:cNvPr id="21" name="TextBox 20"/>
+          <p:cNvPr id="22" name="TextBox 21"/>
           <p:cNvSpPr txBox="1"/>
           <p:nvPr/>
         </p:nvSpPr>
@@ -7737,9 +8016,33 @@
           </a:p>
         </p:txBody>
       </p:sp>
-      <p:sp>
-        <p:nvSpPr>
-          <p:cNvPr id="3" name="TextBox 2"/>
+      <p:pic>
+        <p:nvPicPr>
+          <p:cNvPr id="3" name="Picture 2" descr="ruvision_logo_small.png"/>
+          <p:cNvPicPr>
+            <a:picLocks noChangeAspect="1"/>
+          </p:cNvPicPr>
+          <p:nvPr/>
+        </p:nvPicPr>
+        <p:blipFill>
+          <a:blip r:embed="rId2"/>
+          <a:stretch>
+            <a:fillRect/>
+          </a:stretch>
+        </p:blipFill>
+        <p:spPr>
+          <a:xfrm>
+            <a:off x="11383419" y="182880"/>
+            <a:ext cx="533956" cy="365760"/>
+          </a:xfrm>
+          <a:prstGeom prst="rect">
+            <a:avLst/>
+          </a:prstGeom>
+        </p:spPr>
+      </p:pic>
+      <p:sp>
+        <p:nvSpPr>
+          <p:cNvPr id="4" name="TextBox 3"/>
           <p:cNvSpPr txBox="1"/>
           <p:nvPr/>
         </p:nvSpPr>
@@ -7778,7 +8081,7 @@
       </p:sp>
       <p:sp>
         <p:nvSpPr>
-          <p:cNvPr id="4" name="TextBox 3"/>
+          <p:cNvPr id="5" name="TextBox 4"/>
           <p:cNvSpPr txBox="1"/>
           <p:nvPr/>
         </p:nvSpPr>
@@ -7817,7 +8120,7 @@
       </p:sp>
       <p:sp>
         <p:nvSpPr>
-          <p:cNvPr id="5" name="Rectangle 4"/>
+          <p:cNvPr id="6" name="Rectangle 5"/>
           <p:cNvSpPr/>
           <p:nvPr/>
         </p:nvSpPr>
@@ -7861,7 +8164,7 @@
       </p:sp>
       <p:sp>
         <p:nvSpPr>
-          <p:cNvPr id="6" name="TextBox 5"/>
+          <p:cNvPr id="7" name="TextBox 6"/>
           <p:cNvSpPr txBox="1"/>
           <p:nvPr/>
         </p:nvSpPr>
@@ -7941,7 +8244,7 @@
       </p:sp>
       <p:sp>
         <p:nvSpPr>
-          <p:cNvPr id="7" name="Rounded Rectangle 6"/>
+          <p:cNvPr id="8" name="Rounded Rectangle 7"/>
           <p:cNvSpPr/>
           <p:nvPr/>
         </p:nvSpPr>
@@ -7989,7 +8292,7 @@
       </p:sp>
       <p:sp>
         <p:nvSpPr>
-          <p:cNvPr id="8" name="TextBox 7"/>
+          <p:cNvPr id="9" name="TextBox 8"/>
           <p:cNvSpPr txBox="1"/>
           <p:nvPr/>
         </p:nvSpPr>
@@ -8028,7 +8331,7 @@
       </p:sp>
       <p:sp>
         <p:nvSpPr>
-          <p:cNvPr id="9" name="TextBox 8"/>
+          <p:cNvPr id="10" name="TextBox 9"/>
           <p:cNvSpPr txBox="1"/>
           <p:nvPr/>
         </p:nvSpPr>
@@ -8108,7 +8411,7 @@
       </p:sp>
       <p:sp>
         <p:nvSpPr>
-          <p:cNvPr id="10" name="TextBox 9"/>
+          <p:cNvPr id="11" name="TextBox 10"/>
           <p:cNvSpPr txBox="1"/>
           <p:nvPr/>
         </p:nvSpPr>
@@ -8147,7 +8450,7 @@
       </p:sp>
       <p:sp>
         <p:nvSpPr>
-          <p:cNvPr id="11" name="TextBox 10"/>
+          <p:cNvPr id="12" name="TextBox 11"/>
           <p:cNvSpPr txBox="1"/>
           <p:nvPr/>
         </p:nvSpPr>
@@ -8246,9 +8549,33 @@
           </a:p>
         </p:txBody>
       </p:sp>
-      <p:sp>
-        <p:nvSpPr>
-          <p:cNvPr id="3" name="TextBox 2"/>
+      <p:pic>
+        <p:nvPicPr>
+          <p:cNvPr id="3" name="Picture 2" descr="ruvision_logo_small.png"/>
+          <p:cNvPicPr>
+            <a:picLocks noChangeAspect="1"/>
+          </p:cNvPicPr>
+          <p:nvPr/>
+        </p:nvPicPr>
+        <p:blipFill>
+          <a:blip r:embed="rId2"/>
+          <a:stretch>
+            <a:fillRect/>
+          </a:stretch>
+        </p:blipFill>
+        <p:spPr>
+          <a:xfrm>
+            <a:off x="11383419" y="182880"/>
+            <a:ext cx="533956" cy="365760"/>
+          </a:xfrm>
+          <a:prstGeom prst="rect">
+            <a:avLst/>
+          </a:prstGeom>
+        </p:spPr>
+      </p:pic>
+      <p:sp>
+        <p:nvSpPr>
+          <p:cNvPr id="4" name="TextBox 3"/>
           <p:cNvSpPr txBox="1"/>
           <p:nvPr/>
         </p:nvSpPr>
@@ -8287,7 +8614,7 @@
       </p:sp>
       <p:sp>
         <p:nvSpPr>
-          <p:cNvPr id="4" name="TextBox 3"/>
+          <p:cNvPr id="5" name="TextBox 4"/>
           <p:cNvSpPr txBox="1"/>
           <p:nvPr/>
         </p:nvSpPr>
@@ -8326,7 +8653,7 @@
       </p:sp>
       <p:sp>
         <p:nvSpPr>
-          <p:cNvPr id="5" name="Rectangle 4"/>
+          <p:cNvPr id="6" name="Rectangle 5"/>
           <p:cNvSpPr/>
           <p:nvPr/>
         </p:nvSpPr>
@@ -8370,7 +8697,7 @@
       </p:sp>
       <p:sp>
         <p:nvSpPr>
-          <p:cNvPr id="6" name="Oval 5"/>
+          <p:cNvPr id="7" name="Oval 6"/>
           <p:cNvSpPr/>
           <p:nvPr/>
         </p:nvSpPr>
@@ -8422,7 +8749,7 @@
       </p:sp>
       <p:sp>
         <p:nvSpPr>
-          <p:cNvPr id="7" name="TextBox 6"/>
+          <p:cNvPr id="8" name="TextBox 7"/>
           <p:cNvSpPr txBox="1"/>
           <p:nvPr/>
         </p:nvSpPr>
@@ -8461,7 +8788,7 @@
       </p:sp>
       <p:sp>
         <p:nvSpPr>
-          <p:cNvPr id="8" name="Oval 7"/>
+          <p:cNvPr id="9" name="Oval 8"/>
           <p:cNvSpPr/>
           <p:nvPr/>
         </p:nvSpPr>
@@ -8513,7 +8840,7 @@
       </p:sp>
       <p:sp>
         <p:nvSpPr>
-          <p:cNvPr id="9" name="TextBox 8"/>
+          <p:cNvPr id="10" name="TextBox 9"/>
           <p:cNvSpPr txBox="1"/>
           <p:nvPr/>
         </p:nvSpPr>
@@ -8552,7 +8879,7 @@
       </p:sp>
       <p:sp>
         <p:nvSpPr>
-          <p:cNvPr id="10" name="Oval 9"/>
+          <p:cNvPr id="11" name="Oval 10"/>
           <p:cNvSpPr/>
           <p:nvPr/>
         </p:nvSpPr>
@@ -8604,7 +8931,7 @@
       </p:sp>
       <p:sp>
         <p:nvSpPr>
-          <p:cNvPr id="11" name="TextBox 10"/>
+          <p:cNvPr id="12" name="TextBox 11"/>
           <p:cNvSpPr txBox="1"/>
           <p:nvPr/>
         </p:nvSpPr>
@@ -8643,7 +8970,7 @@
       </p:sp>
       <p:sp>
         <p:nvSpPr>
-          <p:cNvPr id="12" name="Oval 11"/>
+          <p:cNvPr id="13" name="Oval 12"/>
           <p:cNvSpPr/>
           <p:nvPr/>
         </p:nvSpPr>
@@ -8695,7 +9022,7 @@
       </p:sp>
       <p:sp>
         <p:nvSpPr>
-          <p:cNvPr id="13" name="TextBox 12"/>
+          <p:cNvPr id="14" name="TextBox 13"/>
           <p:cNvSpPr txBox="1"/>
           <p:nvPr/>
         </p:nvSpPr>
@@ -8734,7 +9061,7 @@
       </p:sp>
       <p:sp>
         <p:nvSpPr>
-          <p:cNvPr id="14" name="Oval 13"/>
+          <p:cNvPr id="15" name="Oval 14"/>
           <p:cNvSpPr/>
           <p:nvPr/>
         </p:nvSpPr>
@@ -8786,7 +9113,7 @@
       </p:sp>
       <p:sp>
         <p:nvSpPr>
-          <p:cNvPr id="15" name="TextBox 14"/>
+          <p:cNvPr id="16" name="TextBox 15"/>
           <p:cNvSpPr txBox="1"/>
           <p:nvPr/>
         </p:nvSpPr>
@@ -8825,7 +9152,7 @@
       </p:sp>
       <p:sp>
         <p:nvSpPr>
-          <p:cNvPr id="16" name="TextBox 15"/>
+          <p:cNvPr id="17" name="TextBox 16"/>
           <p:cNvSpPr txBox="1"/>
           <p:nvPr/>
         </p:nvSpPr>
@@ -8864,7 +9191,7 @@
       </p:sp>
       <p:sp>
         <p:nvSpPr>
-          <p:cNvPr id="17" name="TextBox 16"/>
+          <p:cNvPr id="18" name="TextBox 17"/>
           <p:cNvSpPr txBox="1"/>
           <p:nvPr/>
         </p:nvSpPr>
@@ -8963,9 +9290,33 @@
           </a:p>
         </p:txBody>
       </p:sp>
-      <p:sp>
-        <p:nvSpPr>
-          <p:cNvPr id="3" name="TextBox 2"/>
+      <p:pic>
+        <p:nvPicPr>
+          <p:cNvPr id="3" name="Picture 2" descr="ruvision_logo_small.png"/>
+          <p:cNvPicPr>
+            <a:picLocks noChangeAspect="1"/>
+          </p:cNvPicPr>
+          <p:nvPr/>
+        </p:nvPicPr>
+        <p:blipFill>
+          <a:blip r:embed="rId2"/>
+          <a:stretch>
+            <a:fillRect/>
+          </a:stretch>
+        </p:blipFill>
+        <p:spPr>
+          <a:xfrm>
+            <a:off x="11383419" y="182880"/>
+            <a:ext cx="533956" cy="365760"/>
+          </a:xfrm>
+          <a:prstGeom prst="rect">
+            <a:avLst/>
+          </a:prstGeom>
+        </p:spPr>
+      </p:pic>
+      <p:sp>
+        <p:nvSpPr>
+          <p:cNvPr id="4" name="TextBox 3"/>
           <p:cNvSpPr txBox="1"/>
           <p:nvPr/>
         </p:nvSpPr>
@@ -9004,7 +9355,7 @@
       </p:sp>
       <p:sp>
         <p:nvSpPr>
-          <p:cNvPr id="4" name="TextBox 3"/>
+          <p:cNvPr id="5" name="TextBox 4"/>
           <p:cNvSpPr txBox="1"/>
           <p:nvPr/>
         </p:nvSpPr>
@@ -9043,7 +9394,7 @@
       </p:sp>
       <p:sp>
         <p:nvSpPr>
-          <p:cNvPr id="5" name="Rectangle 4"/>
+          <p:cNvPr id="6" name="Rectangle 5"/>
           <p:cNvSpPr/>
           <p:nvPr/>
         </p:nvSpPr>
@@ -9087,14 +9438,14 @@
       </p:sp>
       <p:pic>
         <p:nvPicPr>
-          <p:cNvPr id="6" name="Picture 5" descr="detection_feed.png"/>
+          <p:cNvPr id="7" name="Picture 6" descr="detection_feed.png"/>
           <p:cNvPicPr>
             <a:picLocks noChangeAspect="1"/>
           </p:cNvPicPr>
           <p:nvPr/>
         </p:nvPicPr>
         <p:blipFill>
-          <a:blip r:embed="rId2"/>
+          <a:blip r:embed="rId3"/>
           <a:stretch>
             <a:fillRect/>
           </a:stretch>
@@ -9116,7 +9467,7 @@
       </p:pic>
       <p:sp>
         <p:nvSpPr>
-          <p:cNvPr id="7" name="TextBox 6"/>
+          <p:cNvPr id="8" name="TextBox 7"/>
           <p:cNvSpPr txBox="1"/>
           <p:nvPr/>
         </p:nvSpPr>
@@ -9155,7 +9506,7 @@
       </p:sp>
       <p:sp>
         <p:nvSpPr>
-          <p:cNvPr id="8" name="TextBox 7"/>
+          <p:cNvPr id="9" name="TextBox 8"/>
           <p:cNvSpPr txBox="1"/>
           <p:nvPr/>
         </p:nvSpPr>
@@ -9194,7 +9545,7 @@
       </p:sp>
       <p:sp>
         <p:nvSpPr>
-          <p:cNvPr id="9" name="TextBox 8"/>
+          <p:cNvPr id="10" name="TextBox 9"/>
           <p:cNvSpPr txBox="1"/>
           <p:nvPr/>
         </p:nvSpPr>
@@ -9293,9 +9644,33 @@
           </a:p>
         </p:txBody>
       </p:sp>
-      <p:sp>
-        <p:nvSpPr>
-          <p:cNvPr id="3" name="TextBox 2"/>
+      <p:pic>
+        <p:nvPicPr>
+          <p:cNvPr id="3" name="Picture 2" descr="ruvision_logo_small.png"/>
+          <p:cNvPicPr>
+            <a:picLocks noChangeAspect="1"/>
+          </p:cNvPicPr>
+          <p:nvPr/>
+        </p:nvPicPr>
+        <p:blipFill>
+          <a:blip r:embed="rId2"/>
+          <a:stretch>
+            <a:fillRect/>
+          </a:stretch>
+        </p:blipFill>
+        <p:spPr>
+          <a:xfrm>
+            <a:off x="11383419" y="182880"/>
+            <a:ext cx="533956" cy="365760"/>
+          </a:xfrm>
+          <a:prstGeom prst="rect">
+            <a:avLst/>
+          </a:prstGeom>
+        </p:spPr>
+      </p:pic>
+      <p:sp>
+        <p:nvSpPr>
+          <p:cNvPr id="4" name="TextBox 3"/>
           <p:cNvSpPr txBox="1"/>
           <p:nvPr/>
         </p:nvSpPr>
@@ -9334,7 +9709,7 @@
       </p:sp>
       <p:sp>
         <p:nvSpPr>
-          <p:cNvPr id="4" name="TextBox 3"/>
+          <p:cNvPr id="5" name="TextBox 4"/>
           <p:cNvSpPr txBox="1"/>
           <p:nvPr/>
         </p:nvSpPr>
@@ -9373,7 +9748,7 @@
       </p:sp>
       <p:sp>
         <p:nvSpPr>
-          <p:cNvPr id="5" name="Rectangle 4"/>
+          <p:cNvPr id="6" name="Rectangle 5"/>
           <p:cNvSpPr/>
           <p:nvPr/>
         </p:nvSpPr>
@@ -9417,7 +9792,7 @@
       </p:sp>
       <p:sp>
         <p:nvSpPr>
-          <p:cNvPr id="6" name="TextBox 5"/>
+          <p:cNvPr id="7" name="TextBox 6"/>
           <p:cNvSpPr txBox="1"/>
           <p:nvPr/>
         </p:nvSpPr>
@@ -9516,14 +9891,14 @@
       </p:sp>
       <p:pic>
         <p:nvPicPr>
-          <p:cNvPr id="7" name="Picture 6" descr="alert.png"/>
+          <p:cNvPr id="8" name="Picture 7" descr="alert.png"/>
           <p:cNvPicPr>
             <a:picLocks noChangeAspect="1"/>
           </p:cNvPicPr>
           <p:nvPr/>
         </p:nvPicPr>
         <p:blipFill>
-          <a:blip r:embed="rId2"/>
+          <a:blip r:embed="rId3"/>
           <a:stretch>
             <a:fillRect/>
           </a:stretch>
@@ -9545,7 +9920,7 @@
       </p:pic>
       <p:sp>
         <p:nvSpPr>
-          <p:cNvPr id="8" name="TextBox 7"/>
+          <p:cNvPr id="9" name="TextBox 8"/>
           <p:cNvSpPr txBox="1"/>
           <p:nvPr/>
         </p:nvSpPr>
@@ -9584,7 +9959,7 @@
       </p:sp>
       <p:sp>
         <p:nvSpPr>
-          <p:cNvPr id="9" name="TextBox 8"/>
+          <p:cNvPr id="10" name="TextBox 9"/>
           <p:cNvSpPr txBox="1"/>
           <p:nvPr/>
         </p:nvSpPr>
@@ -9623,7 +9998,7 @@
       </p:sp>
       <p:sp>
         <p:nvSpPr>
-          <p:cNvPr id="10" name="TextBox 9"/>
+          <p:cNvPr id="11" name="TextBox 10"/>
           <p:cNvSpPr txBox="1"/>
           <p:nvPr/>
         </p:nvSpPr>
@@ -9722,9 +10097,33 @@
           </a:p>
         </p:txBody>
       </p:sp>
-      <p:sp>
-        <p:nvSpPr>
-          <p:cNvPr id="3" name="TextBox 2"/>
+      <p:pic>
+        <p:nvPicPr>
+          <p:cNvPr id="3" name="Picture 2" descr="ruvision_logo_small.png"/>
+          <p:cNvPicPr>
+            <a:picLocks noChangeAspect="1"/>
+          </p:cNvPicPr>
+          <p:nvPr/>
+        </p:nvPicPr>
+        <p:blipFill>
+          <a:blip r:embed="rId2"/>
+          <a:stretch>
+            <a:fillRect/>
+          </a:stretch>
+        </p:blipFill>
+        <p:spPr>
+          <a:xfrm>
+            <a:off x="11383419" y="182880"/>
+            <a:ext cx="533956" cy="365760"/>
+          </a:xfrm>
+          <a:prstGeom prst="rect">
+            <a:avLst/>
+          </a:prstGeom>
+        </p:spPr>
+      </p:pic>
+      <p:sp>
+        <p:nvSpPr>
+          <p:cNvPr id="4" name="TextBox 3"/>
           <p:cNvSpPr txBox="1"/>
           <p:nvPr/>
         </p:nvSpPr>
@@ -9763,7 +10162,7 @@
       </p:sp>
       <p:sp>
         <p:nvSpPr>
-          <p:cNvPr id="4" name="TextBox 3"/>
+          <p:cNvPr id="5" name="TextBox 4"/>
           <p:cNvSpPr txBox="1"/>
           <p:nvPr/>
         </p:nvSpPr>
@@ -9802,7 +10201,7 @@
       </p:sp>
       <p:sp>
         <p:nvSpPr>
-          <p:cNvPr id="5" name="Rectangle 4"/>
+          <p:cNvPr id="6" name="Rectangle 5"/>
           <p:cNvSpPr/>
           <p:nvPr/>
         </p:nvSpPr>
@@ -9846,7 +10245,7 @@
       </p:sp>
       <p:sp>
         <p:nvSpPr>
-          <p:cNvPr id="6" name="TextBox 5"/>
+          <p:cNvPr id="7" name="TextBox 6"/>
           <p:cNvSpPr txBox="1"/>
           <p:nvPr/>
         </p:nvSpPr>
@@ -9907,14 +10306,14 @@
       </p:sp>
       <p:pic>
         <p:nvPicPr>
-          <p:cNvPr id="7" name="Picture 6" descr="trace.png"/>
+          <p:cNvPr id="8" name="Picture 7" descr="trace.png"/>
           <p:cNvPicPr>
             <a:picLocks noChangeAspect="1"/>
           </p:cNvPicPr>
           <p:nvPr/>
         </p:nvPicPr>
         <p:blipFill>
-          <a:blip r:embed="rId2"/>
+          <a:blip r:embed="rId3"/>
           <a:stretch>
             <a:fillRect/>
           </a:stretch>
@@ -9936,7 +10335,7 @@
       </p:pic>
       <p:sp>
         <p:nvSpPr>
-          <p:cNvPr id="8" name="TextBox 7"/>
+          <p:cNvPr id="9" name="TextBox 8"/>
           <p:cNvSpPr txBox="1"/>
           <p:nvPr/>
         </p:nvSpPr>
@@ -9975,7 +10374,7 @@
       </p:sp>
       <p:sp>
         <p:nvSpPr>
-          <p:cNvPr id="9" name="Rounded Rectangle 8"/>
+          <p:cNvPr id="10" name="Rounded Rectangle 9"/>
           <p:cNvSpPr/>
           <p:nvPr/>
         </p:nvSpPr>
@@ -10023,7 +10422,7 @@
       </p:sp>
       <p:sp>
         <p:nvSpPr>
-          <p:cNvPr id="10" name="TextBox 9"/>
+          <p:cNvPr id="11" name="TextBox 10"/>
           <p:cNvSpPr txBox="1"/>
           <p:nvPr/>
         </p:nvSpPr>
@@ -10062,7 +10461,7 @@
       </p:sp>
       <p:sp>
         <p:nvSpPr>
-          <p:cNvPr id="11" name="TextBox 10"/>
+          <p:cNvPr id="12" name="TextBox 11"/>
           <p:cNvSpPr txBox="1"/>
           <p:nvPr/>
         </p:nvSpPr>
@@ -10123,7 +10522,7 @@
       </p:sp>
       <p:sp>
         <p:nvSpPr>
-          <p:cNvPr id="12" name="TextBox 11"/>
+          <p:cNvPr id="13" name="TextBox 12"/>
           <p:cNvSpPr txBox="1"/>
           <p:nvPr/>
         </p:nvSpPr>
@@ -10162,7 +10561,7 @@
       </p:sp>
       <p:sp>
         <p:nvSpPr>
-          <p:cNvPr id="13" name="TextBox 12"/>
+          <p:cNvPr id="14" name="TextBox 13"/>
           <p:cNvSpPr txBox="1"/>
           <p:nvPr/>
         </p:nvSpPr>
